--- a/Python/Lesson 08 - Python Classes (OOP)/Python Classes (OOP).pptx
+++ b/Python/Lesson 08 - Python Classes (OOP)/Python Classes (OOP).pptx
@@ -130,6 +130,9 @@
     <p:ext uri="{EFAFB233-063F-42B5-8137-9DF3F51BA10A}">
       <p15:sldGuideLst xmlns:p15="http://schemas.microsoft.com/office/powerpoint/2012/main"/>
     </p:ext>
+    <p:ext uri="{2D200454-40CA-4A62-9FC3-DE9A4176ACB9}">
+      <p15:notesGuideLst xmlns:p15="http://schemas.microsoft.com/office/powerpoint/2012/main"/>
+    </p:ext>
   </p:extLst>
 </p:presentation>
 </file>
@@ -228,7 +231,7 @@
           <a:p>
             <a:fld id="{0A4C5E95-A39E-4E95-BC60-F0764558D4FD}" type="datetimeFigureOut">
               <a:rPr lang="en-US" smtClean="0"/>
-              <a:t>29-May-26</a:t>
+              <a:t>7/29/2026</a:t>
             </a:fld>
             <a:endParaRPr lang="en-US"/>
           </a:p>
@@ -405,7 +408,7 @@
           <a:p>
             <a:fld id="{7AE2CED0-0053-4CA5-BBA9-1B4221C85B40}" type="datetimeFigureOut">
               <a:rPr lang="en-US" smtClean="0"/>
-              <a:t>29-May-26</a:t>
+              <a:t>7/29/2026</a:t>
             </a:fld>
             <a:endParaRPr lang="en-US"/>
           </a:p>
@@ -735,15 +738,7 @@
           <a:p>
             <a:r>
               <a:rPr lang="en-US" i="0" dirty="0"/>
-              <a:t>Line 7 instantiates </a:t>
-            </a:r>
-            <a:r>
-              <a:rPr lang="en-US" i="0"/>
-              <a:t>the class, </a:t>
-            </a:r>
-            <a:r>
-              <a:rPr lang="en-US" i="0" dirty="0"/>
-              <a:t>lines 1-5 define the class.</a:t>
+              <a:t>Line 7 instantiates the class, lines 1-5 define the class.</a:t>
             </a:r>
           </a:p>
           <a:p>
@@ -837,6 +832,15 @@
           <a:bodyPr/>
           <a:lstStyle/>
           <a:p>
+            <a:r>
+              <a:rPr lang="en-US" dirty="0"/>
+              <a:t>First argument in a class is always ‘self’</a:t>
+            </a:r>
+          </a:p>
+          <a:p>
+            <a:endParaRPr lang="en-US" dirty="0"/>
+          </a:p>
+          <a:p>
             <a:endParaRPr lang="en-US" dirty="0"/>
           </a:p>
         </p:txBody>
@@ -858,7 +862,7 @@
           <a:p>
             <a:fld id="{84410795-42AE-41C2-B777-14342A77114C}" type="slidenum">
               <a:rPr lang="en-US" smtClean="0"/>
-              <a:t>8</a:t>
+              <a:t>6</a:t>
             </a:fld>
             <a:endParaRPr lang="en-US"/>
           </a:p>
@@ -867,7 +871,7 @@
     </p:spTree>
     <p:extLst>
       <p:ext uri="{BB962C8B-B14F-4D97-AF65-F5344CB8AC3E}">
-        <p14:creationId xmlns:p14="http://schemas.microsoft.com/office/powerpoint/2010/main" val="2372656443"/>
+        <p14:creationId xmlns:p14="http://schemas.microsoft.com/office/powerpoint/2010/main" val="3573921498"/>
       </p:ext>
     </p:extLst>
   </p:cSld>
@@ -942,7 +946,7 @@
           <a:p>
             <a:fld id="{84410795-42AE-41C2-B777-14342A77114C}" type="slidenum">
               <a:rPr lang="en-US" smtClean="0"/>
-              <a:t>12</a:t>
+              <a:t>8</a:t>
             </a:fld>
             <a:endParaRPr lang="en-US"/>
           </a:p>
@@ -951,7 +955,7 @@
     </p:spTree>
     <p:extLst>
       <p:ext uri="{BB962C8B-B14F-4D97-AF65-F5344CB8AC3E}">
-        <p14:creationId xmlns:p14="http://schemas.microsoft.com/office/powerpoint/2010/main" val="3863981259"/>
+        <p14:creationId xmlns:p14="http://schemas.microsoft.com/office/powerpoint/2010/main" val="2372656443"/>
       </p:ext>
     </p:extLst>
   </p:cSld>
@@ -1005,6 +1009,90 @@
           <a:bodyPr/>
           <a:lstStyle/>
           <a:p>
+            <a:endParaRPr lang="en-US" dirty="0"/>
+          </a:p>
+        </p:txBody>
+      </p:sp>
+      <p:sp>
+        <p:nvSpPr>
+          <p:cNvPr id="4" name="Slide Number Placeholder 3"/>
+          <p:cNvSpPr>
+            <a:spLocks noGrp="1"/>
+          </p:cNvSpPr>
+          <p:nvPr>
+            <p:ph type="sldNum" sz="quarter" idx="5"/>
+          </p:nvPr>
+        </p:nvSpPr>
+        <p:spPr/>
+        <p:txBody>
+          <a:bodyPr/>
+          <a:lstStyle/>
+          <a:p>
+            <a:fld id="{84410795-42AE-41C2-B777-14342A77114C}" type="slidenum">
+              <a:rPr lang="en-US" smtClean="0"/>
+              <a:t>12</a:t>
+            </a:fld>
+            <a:endParaRPr lang="en-US"/>
+          </a:p>
+        </p:txBody>
+      </p:sp>
+    </p:spTree>
+    <p:extLst>
+      <p:ext uri="{BB962C8B-B14F-4D97-AF65-F5344CB8AC3E}">
+        <p14:creationId xmlns:p14="http://schemas.microsoft.com/office/powerpoint/2010/main" val="3863981259"/>
+      </p:ext>
+    </p:extLst>
+  </p:cSld>
+  <p:clrMapOvr>
+    <a:masterClrMapping/>
+  </p:clrMapOvr>
+</p:notes>
+</file>
+
+<file path=ppt/notesSlides/notesSlide5.xml><?xml version="1.0" encoding="utf-8"?>
+<p:notes xmlns:a="http://schemas.openxmlformats.org/drawingml/2006/main" xmlns:r="http://schemas.openxmlformats.org/officeDocument/2006/relationships" xmlns:p="http://schemas.openxmlformats.org/presentationml/2006/main">
+  <p:cSld>
+    <p:spTree>
+      <p:nvGrpSpPr>
+        <p:cNvPr id="1" name=""/>
+        <p:cNvGrpSpPr/>
+        <p:nvPr/>
+      </p:nvGrpSpPr>
+      <p:grpSpPr>
+        <a:xfrm>
+          <a:off x="0" y="0"/>
+          <a:ext cx="0" cy="0"/>
+          <a:chOff x="0" y="0"/>
+          <a:chExt cx="0" cy="0"/>
+        </a:xfrm>
+      </p:grpSpPr>
+      <p:sp>
+        <p:nvSpPr>
+          <p:cNvPr id="2" name="Slide Image Placeholder 1"/>
+          <p:cNvSpPr>
+            <a:spLocks noGrp="1" noRot="1" noChangeAspect="1"/>
+          </p:cNvSpPr>
+          <p:nvPr>
+            <p:ph type="sldImg"/>
+          </p:nvPr>
+        </p:nvSpPr>
+        <p:spPr/>
+      </p:sp>
+      <p:sp>
+        <p:nvSpPr>
+          <p:cNvPr id="3" name="Notes Placeholder 2"/>
+          <p:cNvSpPr>
+            <a:spLocks noGrp="1"/>
+          </p:cNvSpPr>
+          <p:nvPr>
+            <p:ph type="body" idx="1"/>
+          </p:nvPr>
+        </p:nvSpPr>
+        <p:spPr/>
+        <p:txBody>
+          <a:bodyPr/>
+          <a:lstStyle/>
+          <a:p>
             <a:r>
               <a:rPr lang="en-US" baseline="30000" dirty="0"/>
               <a:t>1 </a:t>
@@ -1052,7 +1140,7 @@
 </p:notes>
 </file>
 
-<file path=ppt/notesSlides/notesSlide5.xml><?xml version="1.0" encoding="utf-8"?>
+<file path=ppt/notesSlides/notesSlide6.xml><?xml version="1.0" encoding="utf-8"?>
 <p:notes xmlns:a="http://schemas.openxmlformats.org/drawingml/2006/main" xmlns:r="http://schemas.openxmlformats.org/officeDocument/2006/relationships" xmlns:p="http://schemas.openxmlformats.org/presentationml/2006/main">
   <p:cSld>
     <p:spTree>
@@ -1208,7 +1296,7 @@
           <a:p>
             <a:fld id="{7A3E0868-4E26-4CDC-8A56-D70E2D8B12FE}" type="datetime3">
               <a:rPr lang="en-US" smtClean="0"/>
-              <a:t>29 May 2026</a:t>
+              <a:t>29 July 2026</a:t>
             </a:fld>
             <a:endParaRPr lang="en-US"/>
           </a:p>
@@ -3769,7 +3857,7 @@
           <a:p>
             <a:fld id="{A7B8021B-6105-4216-96FC-94348F216D0E}" type="datetime3">
               <a:rPr lang="en-US" smtClean="0"/>
-              <a:t>29 May 2026</a:t>
+              <a:t>29 July 2026</a:t>
             </a:fld>
             <a:endParaRPr lang="en-US"/>
           </a:p>
@@ -5466,7 +5554,7 @@
           <a:p>
             <a:fld id="{5D27CFAB-73E6-44A8-B862-B3306344E3F2}" type="datetime3">
               <a:rPr lang="en-US" smtClean="0"/>
-              <a:t>29 May 2026</a:t>
+              <a:t>29 July 2026</a:t>
             </a:fld>
             <a:endParaRPr lang="en-US"/>
           </a:p>
@@ -7256,7 +7344,7 @@
           <a:p>
             <a:fld id="{A9B2E784-A5F5-4301-881B-94AC8DBF9DED}" type="datetime3">
               <a:rPr lang="en-US" smtClean="0"/>
-              <a:t>29 May 2026</a:t>
+              <a:t>29 July 2026</a:t>
             </a:fld>
             <a:endParaRPr lang="en-US"/>
           </a:p>
@@ -7435,7 +7523,7 @@
           <a:p>
             <a:fld id="{18EAB3A5-9E92-4BB9-8F22-9632B4FBEDBA}" type="datetime3">
               <a:rPr lang="en-US" smtClean="0"/>
-              <a:t>29 May 2026</a:t>
+              <a:t>29 July 2026</a:t>
             </a:fld>
             <a:endParaRPr lang="en-US"/>
           </a:p>
@@ -7662,7 +7750,7 @@
           <a:p>
             <a:fld id="{40923810-5FB2-48C9-96CA-1DE2C4773142}" type="datetime3">
               <a:rPr lang="en-US" smtClean="0"/>
-              <a:t>29 May 2026</a:t>
+              <a:t>29 July 2026</a:t>
             </a:fld>
             <a:endParaRPr lang="en-US"/>
           </a:p>
@@ -7952,7 +8040,7 @@
           <a:p>
             <a:fld id="{E50EFF4B-86EB-42FB-93EA-7D8F9CB2466F}" type="datetime3">
               <a:rPr lang="en-US" smtClean="0"/>
-              <a:t>29 May 2026</a:t>
+              <a:t>29 July 2026</a:t>
             </a:fld>
             <a:endParaRPr lang="en-US"/>
           </a:p>
@@ -8564,7 +8652,7 @@
           <a:p>
             <a:fld id="{FB14FC24-E041-45E9-9A72-E5755A86890F}" type="datetime3">
               <a:rPr lang="en-US" smtClean="0"/>
-              <a:t>29 May 2026</a:t>
+              <a:t>29 July 2026</a:t>
             </a:fld>
             <a:endParaRPr lang="en-US"/>
           </a:p>
@@ -9424,7 +9512,7 @@
           <a:p>
             <a:fld id="{98A19125-94A7-4474-858C-FD9C4ABE9DDA}" type="datetime3">
               <a:rPr lang="en-US" smtClean="0"/>
-              <a:t>29 May 2026</a:t>
+              <a:t>29 July 2026</a:t>
             </a:fld>
             <a:endParaRPr lang="en-US"/>
           </a:p>
@@ -10527,7 +10615,7 @@
           <a:p>
             <a:fld id="{3BA0343D-C8D8-43CE-BB79-50DEA219DB07}" type="datetime3">
               <a:rPr lang="en-US" smtClean="0"/>
-              <a:t>29 May 2026</a:t>
+              <a:t>29 July 2026</a:t>
             </a:fld>
             <a:endParaRPr lang="en-US"/>
           </a:p>
@@ -10816,7 +10904,7 @@
           <a:p>
             <a:fld id="{453BD212-0B9F-4987-965F-AC83B2FC354F}" type="datetime3">
               <a:rPr lang="en-US" smtClean="0"/>
-              <a:t>29 May 2026</a:t>
+              <a:t>29 July 2026</a:t>
             </a:fld>
             <a:endParaRPr lang="en-US"/>
           </a:p>
@@ -11061,7 +11149,7 @@
           <a:p>
             <a:fld id="{6DDC931E-8CBE-4A3F-A034-9B6122C6DCDB}" type="datetime3">
               <a:rPr lang="en-US" smtClean="0"/>
-              <a:t>29 May 2026</a:t>
+              <a:t>29 July 2026</a:t>
             </a:fld>
             <a:endParaRPr lang="en-US"/>
           </a:p>
@@ -12827,7 +12915,7 @@
           <a:p>
             <a:fld id="{220AF9C2-5E8A-4308-AE6B-CA9B65007D0E}" type="datetime3">
               <a:rPr lang="en-US" smtClean="0"/>
-              <a:t>29 May 2026</a:t>
+              <a:t>29 July 2026</a:t>
             </a:fld>
             <a:endParaRPr lang="en-US"/>
           </a:p>
@@ -13140,7 +13228,7 @@
           <a:p>
             <a:fld id="{FF31E861-D2AF-431D-860B-DCF67C218052}" type="datetime3">
               <a:rPr lang="en-US" smtClean="0"/>
-              <a:t>29 May 2026</a:t>
+              <a:t>29 July 2026</a:t>
             </a:fld>
             <a:endParaRPr lang="en-US"/>
           </a:p>
@@ -13419,7 +13507,7 @@
           <a:p>
             <a:fld id="{D1DA25B2-AAF1-4C1F-AA38-12D5BFA7D4C8}" type="datetime3">
               <a:rPr lang="en-US" smtClean="0"/>
-              <a:t>29 May 2026</a:t>
+              <a:t>29 July 2026</a:t>
             </a:fld>
             <a:endParaRPr lang="en-US"/>
           </a:p>
@@ -13698,7 +13786,7 @@
           <a:p>
             <a:fld id="{A25C0F39-45D0-48E9-90B3-7FE8FCE561C8}" type="datetime3">
               <a:rPr lang="en-US" smtClean="0"/>
-              <a:t>29 May 2026</a:t>
+              <a:t>29 July 2026</a:t>
             </a:fld>
             <a:endParaRPr lang="en-US"/>
           </a:p>
@@ -14199,7 +14287,7 @@
           <a:p>
             <a:fld id="{9BAF1A3D-92FA-4F24-9781-74AFA516A230}" type="datetime3">
               <a:rPr lang="en-US" smtClean="0"/>
-              <a:t>29 May 2026</a:t>
+              <a:t>29 July 2026</a:t>
             </a:fld>
             <a:endParaRPr lang="en-US"/>
           </a:p>
@@ -14326,7 +14414,7 @@
           <a:p>
             <a:fld id="{5719C672-856D-4617-A693-8FE15749A9B7}" type="datetime3">
               <a:rPr lang="en-US" smtClean="0"/>
-              <a:t>29 May 2026</a:t>
+              <a:t>29 July 2026</a:t>
             </a:fld>
             <a:endParaRPr lang="en-US"/>
           </a:p>
@@ -14461,7 +14549,7 @@
           <a:p>
             <a:fld id="{5F6C764D-A39E-4C03-B161-E0BC66E8883B}" type="datetime3">
               <a:rPr lang="en-US" smtClean="0"/>
-              <a:t>29 May 2026</a:t>
+              <a:t>29 July 2026</a:t>
             </a:fld>
             <a:endParaRPr lang="en-US"/>
           </a:p>
@@ -14703,7 +14791,7 @@
           <a:p>
             <a:fld id="{6E3E33F9-20B7-4995-BE7D-165DBB597850}" type="datetime3">
               <a:rPr lang="en-US" smtClean="0"/>
-              <a:t>29 May 2026</a:t>
+              <a:t>29 July 2026</a:t>
             </a:fld>
             <a:endParaRPr lang="en-US"/>
           </a:p>
@@ -14816,7 +14904,7 @@
           <a:p>
             <a:fld id="{CD41C263-3501-4369-A962-62B6BF915CDE}" type="datetime3">
               <a:rPr lang="en-US" smtClean="0"/>
-              <a:t>29 May 2026</a:t>
+              <a:t>29 July 2026</a:t>
             </a:fld>
             <a:endParaRPr lang="en-US"/>
           </a:p>
@@ -15219,7 +15307,7 @@
           <a:p>
             <a:fld id="{B06F3EBE-B2E8-4992-9F00-9E4B44F057C0}" type="datetime3">
               <a:rPr lang="en-US" smtClean="0"/>
-              <a:t>29 May 2026</a:t>
+              <a:t>29 July 2026</a:t>
             </a:fld>
             <a:endParaRPr lang="en-US"/>
           </a:p>
@@ -15351,7 +15439,7 @@
           <a:p>
             <a:fld id="{D41656AB-D2E1-472E-8B95-0DF5C6E1D623}" type="datetime3">
               <a:rPr lang="en-US" smtClean="0"/>
-              <a:t>29 May 2026</a:t>
+              <a:t>29 July 2026</a:t>
             </a:fld>
             <a:endParaRPr lang="en-US"/>
           </a:p>
@@ -19468,7 +19556,7 @@
           <a:p>
             <a:fld id="{AD622D1A-DF83-41A8-85FF-04D90BF831D3}" type="datetime3">
               <a:rPr lang="en-US" smtClean="0"/>
-              <a:t>29 May 2026</a:t>
+              <a:t>29 July 2026</a:t>
             </a:fld>
             <a:endParaRPr lang="en-US"/>
           </a:p>
@@ -19718,7 +19806,7 @@
           <a:p>
             <a:fld id="{334F72C3-CDF3-44A8-B602-1649B1728485}" type="datetime3">
               <a:rPr lang="en-US" smtClean="0"/>
-              <a:t>29 May 2026</a:t>
+              <a:t>29 July 2026</a:t>
             </a:fld>
             <a:endParaRPr lang="en-US"/>
           </a:p>
@@ -20025,7 +20113,7 @@
           <a:p>
             <a:fld id="{1E0132BA-B5E7-4FFD-AF6C-169169D47D4A}" type="datetime3">
               <a:rPr lang="en-US" smtClean="0"/>
-              <a:t>29 May 2026</a:t>
+              <a:t>29 July 2026</a:t>
             </a:fld>
             <a:endParaRPr lang="en-US"/>
           </a:p>
@@ -20506,7 +20594,7 @@
           <a:p>
             <a:fld id="{81A30091-1C2A-4151-8D3C-D1E47A72615F}" type="datetime3">
               <a:rPr lang="en-US" smtClean="0"/>
-              <a:t>29 May 2026</a:t>
+              <a:t>29 July 2026</a:t>
             </a:fld>
             <a:endParaRPr lang="en-US"/>
           </a:p>
@@ -21143,7 +21231,7 @@
           <a:p>
             <a:fld id="{35D703CE-07B4-4C05-A488-B4566700621F}" type="datetime3">
               <a:rPr lang="en-US" smtClean="0"/>
-              <a:t>29 May 2026</a:t>
+              <a:t>29 July 2026</a:t>
             </a:fld>
             <a:endParaRPr lang="en-US"/>
           </a:p>
@@ -22201,7 +22289,7 @@
           <a:p>
             <a:fld id="{694BD61C-20BA-43AF-A21F-1DAFB3200099}" type="datetime3">
               <a:rPr lang="en-US" smtClean="0"/>
-              <a:t>29 May 2026</a:t>
+              <a:t>29 July 2026</a:t>
             </a:fld>
             <a:endParaRPr lang="en-US"/>
           </a:p>
@@ -22688,7 +22776,7 @@
           <a:p>
             <a:fld id="{CABCB1B0-B6E5-4DD1-BB55-95C076D6C0C8}" type="datetime3">
               <a:rPr lang="en-US" smtClean="0"/>
-              <a:t>29 May 2026</a:t>
+              <a:t>29 July 2026</a:t>
             </a:fld>
             <a:endParaRPr lang="en-US"/>
           </a:p>
@@ -27030,7 +27118,7 @@
           </p:nvPr>
         </p:nvPicPr>
         <p:blipFill>
-          <a:blip r:embed="rId2"/>
+          <a:blip r:embed="rId3"/>
           <a:stretch>
             <a:fillRect/>
           </a:stretch>
@@ -27491,7 +27579,7 @@
           <a:p>
             <a:fld id="{AD622D1A-DF83-41A8-85FF-04D90BF831D3}" type="datetime3">
               <a:rPr lang="en-US" smtClean="0"/>
-              <a:t>29 May 2026</a:t>
+              <a:t>29 July 2026</a:t>
             </a:fld>
             <a:endParaRPr lang="en-US"/>
           </a:p>
